--- a/Slides/jQuery/16- Events in jQuery.pptx
+++ b/Slides/jQuery/16- Events in jQuery.pptx
@@ -249,7 +249,7 @@
             <a:fld id="{86D088FE-3E68-47FE-8BA4-634CD34BABBC}" type="datetimeFigureOut">
               <a:rPr lang="en-GB" smtClean="0"/>
               <a:pPr/>
-              <a:t>21/05/2026</a:t>
+              <a:t>17/07/2026</a:t>
             </a:fld>
             <a:endParaRPr lang="en-GB"/>
           </a:p>
@@ -421,7 +421,7 @@
             <a:fld id="{1D6B66C6-1E92-0F4E-A300-9D4ED1F0C23F}" type="datetimeFigureOut">
               <a:rPr lang="en-GB" smtClean="0"/>
               <a:pPr/>
-              <a:t>21/05/2026</a:t>
+              <a:t>17/07/2026</a:t>
             </a:fld>
             <a:endParaRPr lang="en-GB"/>
           </a:p>
@@ -33015,7 +33015,7 @@
               <a:t>            </a:t>
             </a:r>
             <a:r>
-              <a:rPr lang="en-GB" sz="1600" b="1" dirty="0" err="1">
+              <a:rPr lang="en-GB" sz="1600" b="1" dirty="0">
                 <a:solidFill>
                   <a:srgbClr val="0000FF"/>
                 </a:solidFill>
@@ -33085,7 +33085,7 @@
               <a:t>            </a:t>
             </a:r>
             <a:r>
-              <a:rPr lang="en-GB" sz="1600" b="1" dirty="0" err="1">
+              <a:rPr lang="en-GB" sz="1600" b="1" dirty="0">
                 <a:solidFill>
                   <a:srgbClr val="0000FF"/>
                 </a:solidFill>
@@ -33348,7 +33348,7 @@
               <a:t> </a:t>
             </a:r>
             <a:r>
-              <a:rPr lang="en-GB" sz="1600" b="1" dirty="0" err="1">
+              <a:rPr lang="en-GB" sz="1600" b="1" dirty="0">
                 <a:solidFill>
                   <a:srgbClr val="FF0000"/>
                 </a:solidFill>
@@ -35849,6 +35849,27 @@
 </file>
 
 <file path=customXml/item1.xml><?xml version="1.0" encoding="utf-8"?>
+<p:properties xmlns:p="http://schemas.microsoft.com/office/2006/metadata/properties" xmlns:xsi="http://www.w3.org/2001/XMLSchema-instance" xmlns:pc="http://schemas.microsoft.com/office/infopath/2007/PartnerControls">
+  <documentManagement>
+    <BookTypeField0 xmlns="B42EA499-AA80-4ED5-9ED5-37A17D3EB549">
+      <Terms xmlns="http://schemas.microsoft.com/office/infopath/2007/PartnerControls"/>
+    </BookTypeField0>
+    <IsBuildFile xmlns="B42EA499-AA80-4ED5-9ED5-37A17D3EB549" xsi:nil="true"/>
+    <SequenceNumber xmlns="B42EA499-AA80-4ED5-9ED5-37A17D3EB549" xsi:nil="true"/>
+  </documentManagement>
+</p:properties>
+</file>
+
+<file path=customXml/item2.xml><?xml version="1.0" encoding="utf-8"?>
+<?mso-contentType ?>
+<FormTemplates xmlns="http://schemas.microsoft.com/sharepoint/v3/contenttype/forms">
+  <Display>DocumentLibraryForm</Display>
+  <Edit>DocumentLibraryForm</Edit>
+  <New>DocumentLibraryForm</New>
+</FormTemplates>
+</file>
+
+<file path=customXml/item3.xml><?xml version="1.0" encoding="utf-8"?>
 <ct:contentTypeSchema xmlns:ct="http://schemas.microsoft.com/office/2006/metadata/contentType" xmlns:ma="http://schemas.microsoft.com/office/2006/metadata/properties/metaAttributes" ct:_="" ma:_="" ma:contentTypeName="Courseware" ma:contentTypeID="0x010100F0967B7CEE8D417F966757887D9466FB005CB7CECC996A5B448C70C3215DE65491" ma:contentTypeVersion="0" ma:contentTypeDescription="Base content type which represents courseware documents" ma:contentTypeScope="" ma:versionID="633ed7bf8a9769dc10b8af609c2e65e8">
   <xsd:schema xmlns:xsd="http://www.w3.org/2001/XMLSchema" xmlns:xs="http://www.w3.org/2001/XMLSchema" xmlns:p="http://schemas.microsoft.com/office/2006/metadata/properties" xmlns:ns2="B42EA499-AA80-4ED5-9ED5-37A17D3EB549" targetNamespace="http://schemas.microsoft.com/office/2006/metadata/properties" ma:root="true" ma:fieldsID="6641bdc0935a9ffdc34b1682c1e0febc" ns2:_="">
     <xsd:import namespace="B42EA499-AA80-4ED5-9ED5-37A17D3EB549"/>
@@ -35988,28 +36009,25 @@
 </ct:contentTypeSchema>
 </file>
 
-<file path=customXml/item2.xml><?xml version="1.0" encoding="utf-8"?>
-<?mso-contentType ?>
-<FormTemplates xmlns="http://schemas.microsoft.com/sharepoint/v3/contenttype/forms">
-  <Display>DocumentLibraryForm</Display>
-  <Edit>DocumentLibraryForm</Edit>
-  <New>DocumentLibraryForm</New>
-</FormTemplates>
+<file path=customXml/itemProps1.xml><?xml version="1.0" encoding="utf-8"?>
+<ds:datastoreItem xmlns:ds="http://schemas.openxmlformats.org/officeDocument/2006/customXml" ds:itemID="{31AFDEE6-0DD0-4552-9763-2F1314FC5107}">
+  <ds:schemaRefs>
+    <ds:schemaRef ds:uri="http://schemas.microsoft.com/office/2006/metadata/properties"/>
+    <ds:schemaRef ds:uri="http://schemas.microsoft.com/office/infopath/2007/PartnerControls"/>
+    <ds:schemaRef ds:uri="B42EA499-AA80-4ED5-9ED5-37A17D3EB549"/>
+  </ds:schemaRefs>
+</ds:datastoreItem>
 </file>
 
-<file path=customXml/item3.xml><?xml version="1.0" encoding="utf-8"?>
-<p:properties xmlns:p="http://schemas.microsoft.com/office/2006/metadata/properties" xmlns:xsi="http://www.w3.org/2001/XMLSchema-instance" xmlns:pc="http://schemas.microsoft.com/office/infopath/2007/PartnerControls">
-  <documentManagement>
-    <BookTypeField0 xmlns="B42EA499-AA80-4ED5-9ED5-37A17D3EB549">
-      <Terms xmlns="http://schemas.microsoft.com/office/infopath/2007/PartnerControls"/>
-    </BookTypeField0>
-    <IsBuildFile xmlns="B42EA499-AA80-4ED5-9ED5-37A17D3EB549" xsi:nil="true"/>
-    <SequenceNumber xmlns="B42EA499-AA80-4ED5-9ED5-37A17D3EB549" xsi:nil="true"/>
-  </documentManagement>
-</p:properties>
+<file path=customXml/itemProps2.xml><?xml version="1.0" encoding="utf-8"?>
+<ds:datastoreItem xmlns:ds="http://schemas.openxmlformats.org/officeDocument/2006/customXml" ds:itemID="{D989BA19-25A7-4EE5-94FF-35763DB61D64}">
+  <ds:schemaRefs>
+    <ds:schemaRef ds:uri="http://schemas.microsoft.com/sharepoint/v3/contenttype/forms"/>
+  </ds:schemaRefs>
+</ds:datastoreItem>
 </file>
 
-<file path=customXml/itemProps1.xml><?xml version="1.0" encoding="utf-8"?>
+<file path=customXml/itemProps3.xml><?xml version="1.0" encoding="utf-8"?>
 <ds:datastoreItem xmlns:ds="http://schemas.openxmlformats.org/officeDocument/2006/customXml" ds:itemID="{54095CE9-ECF8-453B-A3BA-394EBCA5637B}">
   <ds:schemaRefs>
     <ds:schemaRef ds:uri="http://schemas.microsoft.com/office/2006/metadata/contentType"/>
@@ -36025,22 +36043,4 @@
     <ds:schemaRef ds:uri="http://schemas.microsoft.com/internal/obd"/>
   </ds:schemaRefs>
 </ds:datastoreItem>
-</file>
-
-<file path=customXml/itemProps2.xml><?xml version="1.0" encoding="utf-8"?>
-<ds:datastoreItem xmlns:ds="http://schemas.openxmlformats.org/officeDocument/2006/customXml" ds:itemID="{D989BA19-25A7-4EE5-94FF-35763DB61D64}">
-  <ds:schemaRefs>
-    <ds:schemaRef ds:uri="http://schemas.microsoft.com/sharepoint/v3/contenttype/forms"/>
-  </ds:schemaRefs>
-</ds:datastoreItem>
-</file>
-
-<file path=customXml/itemProps3.xml><?xml version="1.0" encoding="utf-8"?>
-<ds:datastoreItem xmlns:ds="http://schemas.openxmlformats.org/officeDocument/2006/customXml" ds:itemID="{31AFDEE6-0DD0-4552-9763-2F1314FC5107}">
-  <ds:schemaRefs>
-    <ds:schemaRef ds:uri="http://schemas.microsoft.com/office/2006/metadata/properties"/>
-    <ds:schemaRef ds:uri="http://schemas.microsoft.com/office/infopath/2007/PartnerControls"/>
-    <ds:schemaRef ds:uri="B42EA499-AA80-4ED5-9ED5-37A17D3EB549"/>
-  </ds:schemaRefs>
-</ds:datastoreItem>
 </file>